--- a/public/assets/templates/new.pptx
+++ b/public/assets/templates/new.pptx
@@ -2840,12 +2840,12 @@
     </a:clrScheme>
     <a:fontScheme name="DeckCraft">
       <a:majorFont>
-        <a:latin typeface="Inter"/>
+        <a:latin typeface="Calibri Light"/>
         <a:ea typeface=""/>
         <a:cs typeface=""/>
       </a:majorFont>
       <a:minorFont>
-        <a:latin typeface="Inter"/>
+        <a:latin typeface="Calibri"/>
         <a:ea typeface=""/>
         <a:cs typeface=""/>
       </a:minorFont>
